--- a/I2Cdumper_20260824.pptx
+++ b/I2Cdumper_20260824.pptx
@@ -6,10 +6,10 @@
     <p:sldMasterId id="2147483760" r:id="rId5"/>
   </p:sldMasterIdLst>
   <p:notesMasterIdLst>
-    <p:notesMasterId r:id="rId14"/>
+    <p:notesMasterId r:id="rId16"/>
   </p:notesMasterIdLst>
   <p:handoutMasterIdLst>
-    <p:handoutMasterId r:id="rId15"/>
+    <p:handoutMasterId r:id="rId17"/>
   </p:handoutMasterIdLst>
   <p:sldIdLst>
     <p:sldId id="348" r:id="rId6"/>
@@ -20,6 +20,8 @@
     <p:sldId id="1679" r:id="rId11"/>
     <p:sldId id="1680" r:id="rId12"/>
     <p:sldId id="1681" r:id="rId13"/>
+    <p:sldId id="1682" r:id="rId14"/>
+    <p:sldId id="1683" r:id="rId15"/>
   </p:sldIdLst>
   <p:sldSz cx="12192000" cy="6858000"/>
   <p:notesSz cx="7010400" cy="9296400"/>
@@ -249,6 +251,29 @@
     </pc:docChg>
   </pc:docChgLst>
   <pc:docChgLst>
+    <pc:chgData name="Rossi Cheng13" userId="S::rcheng13@lenovo.com::420d6378-6e2e-4eeb-bc1a-12ba4b4aae3e" providerId="AD" clId="Web-{2983B347-1F12-B483-7D4C-7C217FC41A08}"/>
+    <pc:docChg chg="addSld modSld">
+      <pc:chgData name="Rossi Cheng13" userId="S::rcheng13@lenovo.com::420d6378-6e2e-4eeb-bc1a-12ba4b4aae3e" providerId="AD" clId="Web-{2983B347-1F12-B483-7D4C-7C217FC41A08}" dt="2024-07-05T09:48:12.360" v="14" actId="20577"/>
+      <pc:docMkLst>
+        <pc:docMk/>
+      </pc:docMkLst>
+      <pc:sldChg chg="modSp">
+        <pc:chgData name="Rossi Cheng13" userId="S::rcheng13@lenovo.com::420d6378-6e2e-4eeb-bc1a-12ba4b4aae3e" providerId="AD" clId="Web-{2983B347-1F12-B483-7D4C-7C217FC41A08}" dt="2024-07-05T09:47:05.593" v="7" actId="20577"/>
+        <pc:sldMkLst>
+          <pc:docMk/>
+          <pc:sldMk cId="0" sldId="348"/>
+        </pc:sldMkLst>
+      </pc:sldChg>
+      <pc:sldChg chg="modSp add replId">
+        <pc:chgData name="Rossi Cheng13" userId="S::rcheng13@lenovo.com::420d6378-6e2e-4eeb-bc1a-12ba4b4aae3e" providerId="AD" clId="Web-{2983B347-1F12-B483-7D4C-7C217FC41A08}" dt="2024-07-05T09:48:12.360" v="14" actId="20577"/>
+        <pc:sldMkLst>
+          <pc:docMk/>
+          <pc:sldMk cId="2160029088" sldId="1691"/>
+        </pc:sldMkLst>
+      </pc:sldChg>
+    </pc:docChg>
+  </pc:docChgLst>
+  <pc:docChgLst>
     <pc:chgData name="Alice Guo3" userId="S::aguo3@lenovo.com::4cedcc93-efb8-4ac4-a840-cc90690f5420" providerId="AD" clId="Web-{52407DDE-E446-94F2-CBFF-48531D601DEE}"/>
     <pc:docChg chg="addSld delSld modSld">
       <pc:chgData name="Alice Guo3" userId="S::aguo3@lenovo.com::4cedcc93-efb8-4ac4-a840-cc90690f5420" providerId="AD" clId="Web-{52407DDE-E446-94F2-CBFF-48531D601DEE}" dt="2024-07-08T07:15:20.005" v="3" actId="1076"/>
@@ -267,29 +292,6 @@
         <pc:sldMkLst>
           <pc:docMk/>
           <pc:sldMk cId="631876034" sldId="1691"/>
-        </pc:sldMkLst>
-      </pc:sldChg>
-    </pc:docChg>
-  </pc:docChgLst>
-  <pc:docChgLst>
-    <pc:chgData name="Rossi Cheng13" userId="S::rcheng13@lenovo.com::420d6378-6e2e-4eeb-bc1a-12ba4b4aae3e" providerId="AD" clId="Web-{2983B347-1F12-B483-7D4C-7C217FC41A08}"/>
-    <pc:docChg chg="addSld modSld">
-      <pc:chgData name="Rossi Cheng13" userId="S::rcheng13@lenovo.com::420d6378-6e2e-4eeb-bc1a-12ba4b4aae3e" providerId="AD" clId="Web-{2983B347-1F12-B483-7D4C-7C217FC41A08}" dt="2024-07-05T09:48:12.360" v="14" actId="20577"/>
-      <pc:docMkLst>
-        <pc:docMk/>
-      </pc:docMkLst>
-      <pc:sldChg chg="modSp">
-        <pc:chgData name="Rossi Cheng13" userId="S::rcheng13@lenovo.com::420d6378-6e2e-4eeb-bc1a-12ba4b4aae3e" providerId="AD" clId="Web-{2983B347-1F12-B483-7D4C-7C217FC41A08}" dt="2024-07-05T09:47:05.593" v="7" actId="20577"/>
-        <pc:sldMkLst>
-          <pc:docMk/>
-          <pc:sldMk cId="0" sldId="348"/>
-        </pc:sldMkLst>
-      </pc:sldChg>
-      <pc:sldChg chg="modSp add replId">
-        <pc:chgData name="Rossi Cheng13" userId="S::rcheng13@lenovo.com::420d6378-6e2e-4eeb-bc1a-12ba4b4aae3e" providerId="AD" clId="Web-{2983B347-1F12-B483-7D4C-7C217FC41A08}" dt="2024-07-05T09:48:12.360" v="14" actId="20577"/>
-        <pc:sldMkLst>
-          <pc:docMk/>
-          <pc:sldMk cId="2160029088" sldId="1691"/>
         </pc:sldMkLst>
       </pc:sldChg>
     </pc:docChg>
@@ -405,22 +407,6 @@
     </pc:docChg>
   </pc:docChgLst>
   <pc:docChgLst>
-    <pc:chgData name="Rossi Cheng13" userId="S::rcheng13@lenovo.com::420d6378-6e2e-4eeb-bc1a-12ba4b4aae3e" providerId="AD" clId="Web-{9FE62588-0953-7369-6766-04F2AF803207}"/>
-    <pc:docChg chg="modSld">
-      <pc:chgData name="Rossi Cheng13" userId="S::rcheng13@lenovo.com::420d6378-6e2e-4eeb-bc1a-12ba4b4aae3e" providerId="AD" clId="Web-{9FE62588-0953-7369-6766-04F2AF803207}" dt="2024-06-21T08:29:59.334" v="3" actId="20577"/>
-      <pc:docMkLst>
-        <pc:docMk/>
-      </pc:docMkLst>
-      <pc:sldChg chg="modSp">
-        <pc:chgData name="Rossi Cheng13" userId="S::rcheng13@lenovo.com::420d6378-6e2e-4eeb-bc1a-12ba4b4aae3e" providerId="AD" clId="Web-{9FE62588-0953-7369-6766-04F2AF803207}" dt="2024-06-21T08:29:59.334" v="3" actId="20577"/>
-        <pc:sldMkLst>
-          <pc:docMk/>
-          <pc:sldMk cId="0" sldId="348"/>
-        </pc:sldMkLst>
-      </pc:sldChg>
-    </pc:docChg>
-  </pc:docChgLst>
-  <pc:docChgLst>
     <pc:chgData name="David Yang13" userId="S::dyang13@lenovo.com::e856da1f-605d-4ee5-ba47-233f6f2cab4a" providerId="AD" clId="Web-{FF470A7E-2579-D072-442B-269E54F567C4}"/>
     <pc:docChg chg="modSld">
       <pc:chgData name="David Yang13" userId="S::dyang13@lenovo.com::e856da1f-605d-4ee5-ba47-233f6f2cab4a" providerId="AD" clId="Web-{FF470A7E-2579-D072-442B-269E54F567C4}" dt="2024-07-23T08:00:17.533" v="4" actId="14100"/>
@@ -494,6 +480,22 @@
             <ac:picMk id="6" creationId="{7A70B1DC-564F-6D2B-01F5-F09583EA500E}"/>
           </ac:picMkLst>
         </pc:picChg>
+      </pc:sldChg>
+    </pc:docChg>
+  </pc:docChgLst>
+  <pc:docChgLst>
+    <pc:chgData name="Rossi Cheng13" userId="S::rcheng13@lenovo.com::420d6378-6e2e-4eeb-bc1a-12ba4b4aae3e" providerId="AD" clId="Web-{9FE62588-0953-7369-6766-04F2AF803207}"/>
+    <pc:docChg chg="modSld">
+      <pc:chgData name="Rossi Cheng13" userId="S::rcheng13@lenovo.com::420d6378-6e2e-4eeb-bc1a-12ba4b4aae3e" providerId="AD" clId="Web-{9FE62588-0953-7369-6766-04F2AF803207}" dt="2024-06-21T08:29:59.334" v="3" actId="20577"/>
+      <pc:docMkLst>
+        <pc:docMk/>
+      </pc:docMkLst>
+      <pc:sldChg chg="modSp">
+        <pc:chgData name="Rossi Cheng13" userId="S::rcheng13@lenovo.com::420d6378-6e2e-4eeb-bc1a-12ba4b4aae3e" providerId="AD" clId="Web-{9FE62588-0953-7369-6766-04F2AF803207}" dt="2024-06-21T08:29:59.334" v="3" actId="20577"/>
+        <pc:sldMkLst>
+          <pc:docMk/>
+          <pc:sldMk cId="0" sldId="348"/>
+        </pc:sldMkLst>
       </pc:sldChg>
     </pc:docChg>
   </pc:docChgLst>
@@ -43601,7 +43603,21 @@
                 <a:ea typeface="+mn-lt"/>
                 <a:cs typeface="+mn-lt"/>
               </a:rPr>
-              <a:t>I2Cdumper user guide</a:t>
+              <a:t>I2C</a:t>
+            </a:r>
+            <a:r>
+              <a:rPr lang="zh-TW" altLang="en-US" sz="3000" dirty="0">
+                <a:ea typeface="+mn-lt"/>
+                <a:cs typeface="+mn-lt"/>
+              </a:rPr>
+              <a:t> </a:t>
+            </a:r>
+            <a:r>
+              <a:rPr lang="en-US" altLang="zh-TW" sz="3000" dirty="0">
+                <a:ea typeface="+mn-lt"/>
+                <a:cs typeface="+mn-lt"/>
+              </a:rPr>
+              <a:t>dumper user guide</a:t>
             </a:r>
             <a:endParaRPr lang="zh-CN" dirty="0"/>
           </a:p>
@@ -43675,7 +43691,28 @@
                 <a:latin typeface="Times New Roman"/>
                 <a:cs typeface="Times New Roman"/>
               </a:rPr>
-              <a:t>2026/06/01</a:t>
+              <a:t>2026/0</a:t>
+            </a:r>
+            <a:r>
+              <a:rPr lang="en-US" altLang="zh-TW" b="1" dirty="0">
+                <a:latin typeface="Times New Roman"/>
+                <a:cs typeface="Times New Roman"/>
+              </a:rPr>
+              <a:t>8</a:t>
+            </a:r>
+            <a:r>
+              <a:rPr lang="en-US" altLang="zh-CN" b="1" dirty="0">
+                <a:latin typeface="Times New Roman"/>
+                <a:cs typeface="Times New Roman"/>
+              </a:rPr>
+              <a:t>/</a:t>
+            </a:r>
+            <a:r>
+              <a:rPr lang="en-US" altLang="zh-TW" b="1" dirty="0">
+                <a:latin typeface="Times New Roman"/>
+                <a:cs typeface="Times New Roman"/>
+              </a:rPr>
+              <a:t>24</a:t>
             </a:r>
             <a:endParaRPr lang="en-US" altLang="zh-CN" b="1" dirty="0">
               <a:latin typeface="Times New Roman" panose="02020603050405020304" pitchFamily="18" charset="0"/>
@@ -43689,6 +43726,1022 @@
   <p:clrMapOvr>
     <a:masterClrMapping/>
   </p:clrMapOvr>
+</p:sld>
+</file>
+
+<file path=ppt/slides/slide10.xml><?xml version="1.0" encoding="utf-8"?>
+<p:sld xmlns:a="http://schemas.openxmlformats.org/drawingml/2006/main" xmlns:r="http://schemas.openxmlformats.org/officeDocument/2006/relationships" xmlns:p="http://schemas.openxmlformats.org/presentationml/2006/main">
+  <p:cSld>
+    <p:spTree>
+      <p:nvGrpSpPr>
+        <p:cNvPr id="1" name="">
+          <a:extLst>
+            <a:ext uri="{FF2B5EF4-FFF2-40B4-BE49-F238E27FC236}">
+              <a16:creationId xmlns:a16="http://schemas.microsoft.com/office/drawing/2014/main" id="{17B3DC3C-8166-2E0C-4712-F87BD8D4FE65}"/>
+            </a:ext>
+          </a:extLst>
+        </p:cNvPr>
+        <p:cNvGrpSpPr/>
+        <p:nvPr/>
+      </p:nvGrpSpPr>
+      <p:grpSpPr>
+        <a:xfrm>
+          <a:off x="0" y="0"/>
+          <a:ext cx="0" cy="0"/>
+          <a:chOff x="0" y="0"/>
+          <a:chExt cx="0" cy="0"/>
+        </a:xfrm>
+      </p:grpSpPr>
+      <p:pic>
+        <p:nvPicPr>
+          <p:cNvPr id="7" name="圖片 6">
+            <a:extLst>
+              <a:ext uri="{FF2B5EF4-FFF2-40B4-BE49-F238E27FC236}">
+                <a16:creationId xmlns:a16="http://schemas.microsoft.com/office/drawing/2014/main" id="{95446CBF-603A-DCFB-01BA-91C5F2590017}"/>
+              </a:ext>
+            </a:extLst>
+          </p:cNvPr>
+          <p:cNvPicPr>
+            <a:picLocks noChangeAspect="1"/>
+          </p:cNvPicPr>
+          <p:nvPr/>
+        </p:nvPicPr>
+        <p:blipFill>
+          <a:blip r:embed="rId2"/>
+          <a:stretch>
+            <a:fillRect/>
+          </a:stretch>
+        </p:blipFill>
+        <p:spPr>
+          <a:xfrm>
+            <a:off x="6096000" y="1391533"/>
+            <a:ext cx="5958167" cy="1690620"/>
+          </a:xfrm>
+          <a:prstGeom prst="rect">
+            <a:avLst/>
+          </a:prstGeom>
+        </p:spPr>
+      </p:pic>
+      <p:sp>
+        <p:nvSpPr>
+          <p:cNvPr id="2" name="內容版面配置區 1">
+            <a:extLst>
+              <a:ext uri="{FF2B5EF4-FFF2-40B4-BE49-F238E27FC236}">
+                <a16:creationId xmlns:a16="http://schemas.microsoft.com/office/drawing/2014/main" id="{0A5B8A0E-1C5F-308B-4716-54BA5C93D7BE}"/>
+              </a:ext>
+            </a:extLst>
+          </p:cNvPr>
+          <p:cNvSpPr>
+            <a:spLocks noGrp="1"/>
+          </p:cNvSpPr>
+          <p:nvPr>
+            <p:ph idx="1"/>
+          </p:nvPr>
+        </p:nvSpPr>
+        <p:spPr/>
+        <p:txBody>
+          <a:bodyPr/>
+          <a:lstStyle/>
+          <a:p>
+            <a:r>
+              <a:rPr lang="en-US" altLang="zh-TW" dirty="0"/>
+              <a:t>Update register dB for Project define</a:t>
+            </a:r>
+            <a:br>
+              <a:rPr lang="en-US" altLang="zh-TW" dirty="0"/>
+            </a:br>
+            <a:br>
+              <a:rPr lang="en-US" altLang="zh-TW" dirty="0"/>
+            </a:br>
+            <a:br>
+              <a:rPr lang="en-US" altLang="zh-TW" sz="1600" dirty="0">
+                <a:latin typeface="Calibri" panose="020F0502020204030204" pitchFamily="34" charset="0"/>
+                <a:ea typeface="Calibri" panose="020F0502020204030204" pitchFamily="34" charset="0"/>
+                <a:cs typeface="Calibri" panose="020F0502020204030204" pitchFamily="34" charset="0"/>
+              </a:rPr>
+            </a:br>
+            <a:br>
+              <a:rPr lang="en-US" altLang="zh-TW" dirty="0"/>
+            </a:br>
+            <a:endParaRPr lang="zh-TW" altLang="en-US" dirty="0"/>
+          </a:p>
+        </p:txBody>
+      </p:sp>
+      <p:sp>
+        <p:nvSpPr>
+          <p:cNvPr id="3" name="投影片編號版面配置區 2">
+            <a:extLst>
+              <a:ext uri="{FF2B5EF4-FFF2-40B4-BE49-F238E27FC236}">
+                <a16:creationId xmlns:a16="http://schemas.microsoft.com/office/drawing/2014/main" id="{3425D465-6DCE-6650-77BF-CC2443CFC6A2}"/>
+              </a:ext>
+            </a:extLst>
+          </p:cNvPr>
+          <p:cNvSpPr>
+            <a:spLocks noGrp="1"/>
+          </p:cNvSpPr>
+          <p:nvPr>
+            <p:ph type="sldNum" sz="quarter" idx="10"/>
+          </p:nvPr>
+        </p:nvSpPr>
+        <p:spPr/>
+        <p:txBody>
+          <a:bodyPr/>
+          <a:lstStyle/>
+          <a:p>
+            <a:pPr algn="ctr"/>
+            <a:fld id="{9A19501A-2BD8-413C-A869-D888369A0240}" type="slidenum">
+              <a:rPr lang="en-US" smtClean="0"/>
+              <a:pPr algn="ctr"/>
+              <a:t>10</a:t>
+            </a:fld>
+            <a:endParaRPr lang="en-US"/>
+          </a:p>
+        </p:txBody>
+      </p:sp>
+      <p:sp>
+        <p:nvSpPr>
+          <p:cNvPr id="4" name="標題 3">
+            <a:extLst>
+              <a:ext uri="{FF2B5EF4-FFF2-40B4-BE49-F238E27FC236}">
+                <a16:creationId xmlns:a16="http://schemas.microsoft.com/office/drawing/2014/main" id="{FE3727CD-55FF-2A14-1095-4DA227AF8D6C}"/>
+              </a:ext>
+            </a:extLst>
+          </p:cNvPr>
+          <p:cNvSpPr>
+            <a:spLocks noGrp="1"/>
+          </p:cNvSpPr>
+          <p:nvPr>
+            <p:ph type="title"/>
+          </p:nvPr>
+        </p:nvSpPr>
+        <p:spPr/>
+        <p:txBody>
+          <a:bodyPr/>
+          <a:lstStyle/>
+          <a:p>
+            <a:r>
+              <a:rPr lang="en-US" altLang="zh-TW" b="1" dirty="0">
+                <a:latin typeface="Times New Roman" panose="02020603050405020304" pitchFamily="18" charset="0"/>
+                <a:cs typeface="Times New Roman" panose="02020603050405020304" pitchFamily="18" charset="0"/>
+              </a:rPr>
+              <a:t> Update the Code for Another Project</a:t>
+            </a:r>
+            <a:endParaRPr lang="zh-TW" altLang="en-US" b="1" dirty="0">
+              <a:latin typeface="Times New Roman" panose="02020603050405020304" pitchFamily="18" charset="0"/>
+              <a:cs typeface="Times New Roman" panose="02020603050405020304" pitchFamily="18" charset="0"/>
+            </a:endParaRPr>
+          </a:p>
+        </p:txBody>
+      </p:sp>
+      <p:sp>
+        <p:nvSpPr>
+          <p:cNvPr id="14" name="箭號: 向右 13">
+            <a:extLst>
+              <a:ext uri="{FF2B5EF4-FFF2-40B4-BE49-F238E27FC236}">
+                <a16:creationId xmlns:a16="http://schemas.microsoft.com/office/drawing/2014/main" id="{302CCB4D-1CFD-6DB2-4867-46B9F89634D0}"/>
+              </a:ext>
+            </a:extLst>
+          </p:cNvPr>
+          <p:cNvSpPr/>
+          <p:nvPr/>
+        </p:nvSpPr>
+        <p:spPr>
+          <a:xfrm rot="5400000">
+            <a:off x="6912413" y="3423619"/>
+            <a:ext cx="1635526" cy="654050"/>
+          </a:xfrm>
+          <a:prstGeom prst="rightArrow">
+            <a:avLst/>
+          </a:prstGeom>
+          <a:solidFill>
+            <a:srgbClr val="FF0000"/>
+          </a:solidFill>
+          <a:ln>
+            <a:noFill/>
+          </a:ln>
+        </p:spPr>
+        <p:style>
+          <a:lnRef idx="2">
+            <a:schemeClr val="accent1">
+              <a:shade val="50000"/>
+            </a:schemeClr>
+          </a:lnRef>
+          <a:fillRef idx="1">
+            <a:schemeClr val="accent1"/>
+          </a:fillRef>
+          <a:effectRef idx="0">
+            <a:schemeClr val="accent1"/>
+          </a:effectRef>
+          <a:fontRef idx="minor">
+            <a:schemeClr val="lt1"/>
+          </a:fontRef>
+        </p:style>
+        <p:txBody>
+          <a:bodyPr rot="0" spcFirstLastPara="0" vertOverflow="overflow" horzOverflow="overflow" vert="horz" wrap="square" lIns="91440" tIns="45720" rIns="91440" bIns="45720" numCol="1" spcCol="0" rtlCol="0" fromWordArt="0" anchor="t" anchorCtr="0" forceAA="0" compatLnSpc="1">
+            <a:prstTxWarp prst="textNoShape">
+              <a:avLst/>
+            </a:prstTxWarp>
+            <a:noAutofit/>
+          </a:bodyPr>
+          <a:lstStyle/>
+          <a:p>
+            <a:pPr algn="l"/>
+            <a:endParaRPr lang="zh-TW" altLang="en-US" dirty="0"/>
+          </a:p>
+        </p:txBody>
+      </p:sp>
+      <p:pic>
+        <p:nvPicPr>
+          <p:cNvPr id="16" name="圖片 15">
+            <a:extLst>
+              <a:ext uri="{FF2B5EF4-FFF2-40B4-BE49-F238E27FC236}">
+                <a16:creationId xmlns:a16="http://schemas.microsoft.com/office/drawing/2014/main" id="{A6AF087A-68F3-9700-3236-0737031C48D3}"/>
+              </a:ext>
+            </a:extLst>
+          </p:cNvPr>
+          <p:cNvPicPr>
+            <a:picLocks noChangeAspect="1"/>
+          </p:cNvPicPr>
+          <p:nvPr/>
+        </p:nvPicPr>
+        <p:blipFill>
+          <a:blip r:embed="rId3"/>
+          <a:stretch>
+            <a:fillRect/>
+          </a:stretch>
+        </p:blipFill>
+        <p:spPr>
+          <a:xfrm>
+            <a:off x="6261463" y="4568407"/>
+            <a:ext cx="5495057" cy="1161928"/>
+          </a:xfrm>
+          <a:prstGeom prst="rect">
+            <a:avLst/>
+          </a:prstGeom>
+        </p:spPr>
+      </p:pic>
+      <p:pic>
+        <p:nvPicPr>
+          <p:cNvPr id="19" name="圖片 18">
+            <a:extLst>
+              <a:ext uri="{FF2B5EF4-FFF2-40B4-BE49-F238E27FC236}">
+                <a16:creationId xmlns:a16="http://schemas.microsoft.com/office/drawing/2014/main" id="{AD9FBB42-625A-7895-0523-E00A4E9A5EB8}"/>
+              </a:ext>
+            </a:extLst>
+          </p:cNvPr>
+          <p:cNvPicPr>
+            <a:picLocks noChangeAspect="1"/>
+          </p:cNvPicPr>
+          <p:nvPr/>
+        </p:nvPicPr>
+        <p:blipFill>
+          <a:blip r:embed="rId4"/>
+          <a:srcRect b="50000"/>
+          <a:stretch>
+            <a:fillRect/>
+          </a:stretch>
+        </p:blipFill>
+        <p:spPr>
+          <a:xfrm>
+            <a:off x="549351" y="2508248"/>
+            <a:ext cx="4624861" cy="1545455"/>
+          </a:xfrm>
+          <a:prstGeom prst="rect">
+            <a:avLst/>
+          </a:prstGeom>
+        </p:spPr>
+      </p:pic>
+      <p:pic>
+        <p:nvPicPr>
+          <p:cNvPr id="21" name="圖片 20">
+            <a:extLst>
+              <a:ext uri="{FF2B5EF4-FFF2-40B4-BE49-F238E27FC236}">
+                <a16:creationId xmlns:a16="http://schemas.microsoft.com/office/drawing/2014/main" id="{D00A9B13-41C4-D540-C033-EEF7D06123EC}"/>
+              </a:ext>
+            </a:extLst>
+          </p:cNvPr>
+          <p:cNvPicPr>
+            <a:picLocks noChangeAspect="1"/>
+          </p:cNvPicPr>
+          <p:nvPr/>
+        </p:nvPicPr>
+        <p:blipFill>
+          <a:blip r:embed="rId5"/>
+          <a:stretch>
+            <a:fillRect/>
+          </a:stretch>
+        </p:blipFill>
+        <p:spPr>
+          <a:xfrm>
+            <a:off x="549351" y="4814786"/>
+            <a:ext cx="4650304" cy="669169"/>
+          </a:xfrm>
+          <a:prstGeom prst="rect">
+            <a:avLst/>
+          </a:prstGeom>
+        </p:spPr>
+      </p:pic>
+      <p:sp>
+        <p:nvSpPr>
+          <p:cNvPr id="22" name="矩形 21">
+            <a:extLst>
+              <a:ext uri="{FF2B5EF4-FFF2-40B4-BE49-F238E27FC236}">
+                <a16:creationId xmlns:a16="http://schemas.microsoft.com/office/drawing/2014/main" id="{C6092B53-4BC8-E47A-BFAE-B1CF83A82D1C}"/>
+              </a:ext>
+            </a:extLst>
+          </p:cNvPr>
+          <p:cNvSpPr/>
+          <p:nvPr/>
+        </p:nvSpPr>
+        <p:spPr>
+          <a:xfrm>
+            <a:off x="701675" y="2768600"/>
+            <a:ext cx="517525" cy="196850"/>
+          </a:xfrm>
+          <a:prstGeom prst="rect">
+            <a:avLst/>
+          </a:prstGeom>
+          <a:noFill/>
+          <a:ln>
+            <a:solidFill>
+              <a:schemeClr val="accent1"/>
+            </a:solidFill>
+          </a:ln>
+        </p:spPr>
+        <p:style>
+          <a:lnRef idx="2">
+            <a:schemeClr val="accent1">
+              <a:shade val="50000"/>
+            </a:schemeClr>
+          </a:lnRef>
+          <a:fillRef idx="1">
+            <a:schemeClr val="accent1"/>
+          </a:fillRef>
+          <a:effectRef idx="0">
+            <a:schemeClr val="accent1"/>
+          </a:effectRef>
+          <a:fontRef idx="minor">
+            <a:schemeClr val="lt1"/>
+          </a:fontRef>
+        </p:style>
+        <p:txBody>
+          <a:bodyPr rot="0" spcFirstLastPara="0" vertOverflow="overflow" horzOverflow="overflow" vert="horz" wrap="square" lIns="91440" tIns="45720" rIns="91440" bIns="45720" numCol="1" spcCol="0" rtlCol="0" fromWordArt="0" anchor="t" anchorCtr="0" forceAA="0" compatLnSpc="1">
+            <a:prstTxWarp prst="textNoShape">
+              <a:avLst/>
+            </a:prstTxWarp>
+            <a:noAutofit/>
+          </a:bodyPr>
+          <a:lstStyle/>
+          <a:p>
+            <a:pPr algn="l"/>
+            <a:endParaRPr lang="zh-TW" altLang="en-US" dirty="0"/>
+          </a:p>
+        </p:txBody>
+      </p:sp>
+      <p:cxnSp>
+        <p:nvCxnSpPr>
+          <p:cNvPr id="24" name="直線單箭頭接點 23">
+            <a:extLst>
+              <a:ext uri="{FF2B5EF4-FFF2-40B4-BE49-F238E27FC236}">
+                <a16:creationId xmlns:a16="http://schemas.microsoft.com/office/drawing/2014/main" id="{CB00CA68-40E7-ED98-D118-25641000D4E0}"/>
+              </a:ext>
+            </a:extLst>
+          </p:cNvPr>
+          <p:cNvCxnSpPr>
+            <a:cxnSpLocks/>
+            <a:stCxn id="22" idx="2"/>
+          </p:cNvCxnSpPr>
+          <p:nvPr/>
+        </p:nvCxnSpPr>
+        <p:spPr>
+          <a:xfrm flipH="1">
+            <a:off x="824969" y="2965450"/>
+            <a:ext cx="135469" cy="1905000"/>
+          </a:xfrm>
+          <a:prstGeom prst="straightConnector1">
+            <a:avLst/>
+          </a:prstGeom>
+          <a:ln>
+            <a:solidFill>
+              <a:schemeClr val="accent1"/>
+            </a:solidFill>
+            <a:tailEnd type="triangle"/>
+          </a:ln>
+        </p:spPr>
+        <p:style>
+          <a:lnRef idx="1">
+            <a:schemeClr val="accent1"/>
+          </a:lnRef>
+          <a:fillRef idx="0">
+            <a:schemeClr val="accent1"/>
+          </a:fillRef>
+          <a:effectRef idx="0">
+            <a:schemeClr val="accent1"/>
+          </a:effectRef>
+          <a:fontRef idx="minor">
+            <a:schemeClr val="tx1"/>
+          </a:fontRef>
+        </p:style>
+      </p:cxnSp>
+      <p:sp>
+        <p:nvSpPr>
+          <p:cNvPr id="25" name="矩形 24">
+            <a:extLst>
+              <a:ext uri="{FF2B5EF4-FFF2-40B4-BE49-F238E27FC236}">
+                <a16:creationId xmlns:a16="http://schemas.microsoft.com/office/drawing/2014/main" id="{7F14AD6D-6CAE-E120-2CC3-FED3EC22A82A}"/>
+              </a:ext>
+            </a:extLst>
+          </p:cNvPr>
+          <p:cNvSpPr/>
+          <p:nvPr/>
+        </p:nvSpPr>
+        <p:spPr>
+          <a:xfrm>
+            <a:off x="1746757" y="2936824"/>
+            <a:ext cx="834517" cy="196850"/>
+          </a:xfrm>
+          <a:prstGeom prst="rect">
+            <a:avLst/>
+          </a:prstGeom>
+          <a:noFill/>
+          <a:ln>
+            <a:solidFill>
+              <a:schemeClr val="accent1"/>
+            </a:solidFill>
+          </a:ln>
+        </p:spPr>
+        <p:style>
+          <a:lnRef idx="2">
+            <a:schemeClr val="accent1">
+              <a:shade val="50000"/>
+            </a:schemeClr>
+          </a:lnRef>
+          <a:fillRef idx="1">
+            <a:schemeClr val="accent1"/>
+          </a:fillRef>
+          <a:effectRef idx="0">
+            <a:schemeClr val="accent1"/>
+          </a:effectRef>
+          <a:fontRef idx="minor">
+            <a:schemeClr val="lt1"/>
+          </a:fontRef>
+        </p:style>
+        <p:txBody>
+          <a:bodyPr rot="0" spcFirstLastPara="0" vertOverflow="overflow" horzOverflow="overflow" vert="horz" wrap="square" lIns="91440" tIns="45720" rIns="91440" bIns="45720" numCol="1" spcCol="0" rtlCol="0" fromWordArt="0" anchor="t" anchorCtr="0" forceAA="0" compatLnSpc="1">
+            <a:prstTxWarp prst="textNoShape">
+              <a:avLst/>
+            </a:prstTxWarp>
+            <a:noAutofit/>
+          </a:bodyPr>
+          <a:lstStyle/>
+          <a:p>
+            <a:pPr algn="l"/>
+            <a:endParaRPr lang="zh-TW" altLang="en-US" dirty="0"/>
+          </a:p>
+        </p:txBody>
+      </p:sp>
+      <p:cxnSp>
+        <p:nvCxnSpPr>
+          <p:cNvPr id="26" name="直線單箭頭接點 25">
+            <a:extLst>
+              <a:ext uri="{FF2B5EF4-FFF2-40B4-BE49-F238E27FC236}">
+                <a16:creationId xmlns:a16="http://schemas.microsoft.com/office/drawing/2014/main" id="{1775E907-965C-2C92-C177-B42B289B90A4}"/>
+              </a:ext>
+            </a:extLst>
+          </p:cNvPr>
+          <p:cNvCxnSpPr>
+            <a:cxnSpLocks/>
+            <a:stCxn id="25" idx="2"/>
+          </p:cNvCxnSpPr>
+          <p:nvPr/>
+        </p:nvCxnSpPr>
+        <p:spPr>
+          <a:xfrm flipH="1">
+            <a:off x="1607443" y="3133674"/>
+            <a:ext cx="556573" cy="1736776"/>
+          </a:xfrm>
+          <a:prstGeom prst="straightConnector1">
+            <a:avLst/>
+          </a:prstGeom>
+          <a:ln>
+            <a:solidFill>
+              <a:schemeClr val="accent1"/>
+            </a:solidFill>
+            <a:tailEnd type="triangle"/>
+          </a:ln>
+        </p:spPr>
+        <p:style>
+          <a:lnRef idx="1">
+            <a:schemeClr val="accent1"/>
+          </a:lnRef>
+          <a:fillRef idx="0">
+            <a:schemeClr val="accent1"/>
+          </a:fillRef>
+          <a:effectRef idx="0">
+            <a:schemeClr val="accent1"/>
+          </a:effectRef>
+          <a:fontRef idx="minor">
+            <a:schemeClr val="tx1"/>
+          </a:fontRef>
+        </p:style>
+      </p:cxnSp>
+      <p:sp>
+        <p:nvSpPr>
+          <p:cNvPr id="29" name="矩形 28">
+            <a:extLst>
+              <a:ext uri="{FF2B5EF4-FFF2-40B4-BE49-F238E27FC236}">
+                <a16:creationId xmlns:a16="http://schemas.microsoft.com/office/drawing/2014/main" id="{DF4ADC14-EB96-4487-1C16-CDC61343EB31}"/>
+              </a:ext>
+            </a:extLst>
+          </p:cNvPr>
+          <p:cNvSpPr/>
+          <p:nvPr/>
+        </p:nvSpPr>
+        <p:spPr>
+          <a:xfrm>
+            <a:off x="3109501" y="3330575"/>
+            <a:ext cx="991012" cy="527050"/>
+          </a:xfrm>
+          <a:prstGeom prst="rect">
+            <a:avLst/>
+          </a:prstGeom>
+          <a:noFill/>
+          <a:ln>
+            <a:solidFill>
+              <a:schemeClr val="accent1"/>
+            </a:solidFill>
+          </a:ln>
+        </p:spPr>
+        <p:style>
+          <a:lnRef idx="2">
+            <a:schemeClr val="accent1">
+              <a:shade val="50000"/>
+            </a:schemeClr>
+          </a:lnRef>
+          <a:fillRef idx="1">
+            <a:schemeClr val="accent1"/>
+          </a:fillRef>
+          <a:effectRef idx="0">
+            <a:schemeClr val="accent1"/>
+          </a:effectRef>
+          <a:fontRef idx="minor">
+            <a:schemeClr val="lt1"/>
+          </a:fontRef>
+        </p:style>
+        <p:txBody>
+          <a:bodyPr rot="0" spcFirstLastPara="0" vertOverflow="overflow" horzOverflow="overflow" vert="horz" wrap="square" lIns="91440" tIns="45720" rIns="91440" bIns="45720" numCol="1" spcCol="0" rtlCol="0" fromWordArt="0" anchor="t" anchorCtr="0" forceAA="0" compatLnSpc="1">
+            <a:prstTxWarp prst="textNoShape">
+              <a:avLst/>
+            </a:prstTxWarp>
+            <a:noAutofit/>
+          </a:bodyPr>
+          <a:lstStyle/>
+          <a:p>
+            <a:pPr algn="l"/>
+            <a:endParaRPr lang="zh-TW" altLang="en-US" dirty="0"/>
+          </a:p>
+        </p:txBody>
+      </p:sp>
+      <p:sp>
+        <p:nvSpPr>
+          <p:cNvPr id="33" name="矩形 32">
+            <a:extLst>
+              <a:ext uri="{FF2B5EF4-FFF2-40B4-BE49-F238E27FC236}">
+                <a16:creationId xmlns:a16="http://schemas.microsoft.com/office/drawing/2014/main" id="{EF75D750-9CF5-A27A-EA8B-E6B9E06F7D8D}"/>
+              </a:ext>
+            </a:extLst>
+          </p:cNvPr>
+          <p:cNvSpPr/>
+          <p:nvPr/>
+        </p:nvSpPr>
+        <p:spPr>
+          <a:xfrm>
+            <a:off x="812800" y="4956652"/>
+            <a:ext cx="249238" cy="487738"/>
+          </a:xfrm>
+          <a:prstGeom prst="rect">
+            <a:avLst/>
+          </a:prstGeom>
+          <a:noFill/>
+          <a:ln>
+            <a:solidFill>
+              <a:schemeClr val="accent1"/>
+            </a:solidFill>
+          </a:ln>
+        </p:spPr>
+        <p:style>
+          <a:lnRef idx="2">
+            <a:schemeClr val="accent1">
+              <a:shade val="50000"/>
+            </a:schemeClr>
+          </a:lnRef>
+          <a:fillRef idx="1">
+            <a:schemeClr val="accent1"/>
+          </a:fillRef>
+          <a:effectRef idx="0">
+            <a:schemeClr val="accent1"/>
+          </a:effectRef>
+          <a:fontRef idx="minor">
+            <a:schemeClr val="lt1"/>
+          </a:fontRef>
+        </p:style>
+        <p:txBody>
+          <a:bodyPr rot="0" spcFirstLastPara="0" vertOverflow="overflow" horzOverflow="overflow" vert="horz" wrap="square" lIns="91440" tIns="45720" rIns="91440" bIns="45720" numCol="1" spcCol="0" rtlCol="0" fromWordArt="0" anchor="t" anchorCtr="0" forceAA="0" compatLnSpc="1">
+            <a:prstTxWarp prst="textNoShape">
+              <a:avLst/>
+            </a:prstTxWarp>
+            <a:noAutofit/>
+          </a:bodyPr>
+          <a:lstStyle/>
+          <a:p>
+            <a:pPr algn="l"/>
+            <a:endParaRPr lang="zh-TW" altLang="en-US" dirty="0"/>
+          </a:p>
+        </p:txBody>
+      </p:sp>
+      <p:sp>
+        <p:nvSpPr>
+          <p:cNvPr id="34" name="矩形 33">
+            <a:extLst>
+              <a:ext uri="{FF2B5EF4-FFF2-40B4-BE49-F238E27FC236}">
+                <a16:creationId xmlns:a16="http://schemas.microsoft.com/office/drawing/2014/main" id="{6A161BE4-B120-BBE1-31D4-E1C97C7429AF}"/>
+              </a:ext>
+            </a:extLst>
+          </p:cNvPr>
+          <p:cNvSpPr/>
+          <p:nvPr/>
+        </p:nvSpPr>
+        <p:spPr>
+          <a:xfrm>
+            <a:off x="1979175" y="3330575"/>
+            <a:ext cx="991012" cy="527050"/>
+          </a:xfrm>
+          <a:prstGeom prst="rect">
+            <a:avLst/>
+          </a:prstGeom>
+          <a:noFill/>
+          <a:ln>
+            <a:solidFill>
+              <a:schemeClr val="accent1"/>
+            </a:solidFill>
+          </a:ln>
+        </p:spPr>
+        <p:style>
+          <a:lnRef idx="2">
+            <a:schemeClr val="accent1">
+              <a:shade val="50000"/>
+            </a:schemeClr>
+          </a:lnRef>
+          <a:fillRef idx="1">
+            <a:schemeClr val="accent1"/>
+          </a:fillRef>
+          <a:effectRef idx="0">
+            <a:schemeClr val="accent1"/>
+          </a:effectRef>
+          <a:fontRef idx="minor">
+            <a:schemeClr val="lt1"/>
+          </a:fontRef>
+        </p:style>
+        <p:txBody>
+          <a:bodyPr rot="0" spcFirstLastPara="0" vertOverflow="overflow" horzOverflow="overflow" vert="horz" wrap="square" lIns="91440" tIns="45720" rIns="91440" bIns="45720" numCol="1" spcCol="0" rtlCol="0" fromWordArt="0" anchor="t" anchorCtr="0" forceAA="0" compatLnSpc="1">
+            <a:prstTxWarp prst="textNoShape">
+              <a:avLst/>
+            </a:prstTxWarp>
+            <a:noAutofit/>
+          </a:bodyPr>
+          <a:lstStyle/>
+          <a:p>
+            <a:pPr algn="l"/>
+            <a:endParaRPr lang="zh-TW" altLang="en-US" dirty="0"/>
+          </a:p>
+        </p:txBody>
+      </p:sp>
+      <p:cxnSp>
+        <p:nvCxnSpPr>
+          <p:cNvPr id="39" name="接點: 肘形 38">
+            <a:extLst>
+              <a:ext uri="{FF2B5EF4-FFF2-40B4-BE49-F238E27FC236}">
+                <a16:creationId xmlns:a16="http://schemas.microsoft.com/office/drawing/2014/main" id="{B8F635CF-E642-8E8D-6AC7-05F57E6B02B3}"/>
+              </a:ext>
+            </a:extLst>
+          </p:cNvPr>
+          <p:cNvCxnSpPr>
+            <a:stCxn id="34" idx="2"/>
+            <a:endCxn id="33" idx="0"/>
+          </p:cNvCxnSpPr>
+          <p:nvPr/>
+        </p:nvCxnSpPr>
+        <p:spPr>
+          <a:xfrm rot="5400000">
+            <a:off x="1156537" y="3638507"/>
+            <a:ext cx="1099027" cy="1537262"/>
+          </a:xfrm>
+          <a:prstGeom prst="bentConnector3">
+            <a:avLst/>
+          </a:prstGeom>
+          <a:ln>
+            <a:solidFill>
+              <a:srgbClr val="FF0000"/>
+            </a:solidFill>
+            <a:tailEnd type="triangle"/>
+          </a:ln>
+        </p:spPr>
+        <p:style>
+          <a:lnRef idx="1">
+            <a:schemeClr val="accent1"/>
+          </a:lnRef>
+          <a:fillRef idx="0">
+            <a:schemeClr val="accent1"/>
+          </a:fillRef>
+          <a:effectRef idx="0">
+            <a:schemeClr val="accent1"/>
+          </a:effectRef>
+          <a:fontRef idx="minor">
+            <a:schemeClr val="tx1"/>
+          </a:fontRef>
+        </p:style>
+      </p:cxnSp>
+      <p:cxnSp>
+        <p:nvCxnSpPr>
+          <p:cNvPr id="43" name="接點: 肘形 42">
+            <a:extLst>
+              <a:ext uri="{FF2B5EF4-FFF2-40B4-BE49-F238E27FC236}">
+                <a16:creationId xmlns:a16="http://schemas.microsoft.com/office/drawing/2014/main" id="{EB2C4940-D812-8194-9C5C-A8174CF424CC}"/>
+              </a:ext>
+            </a:extLst>
+          </p:cNvPr>
+          <p:cNvCxnSpPr>
+            <a:cxnSpLocks/>
+            <a:stCxn id="29" idx="2"/>
+            <a:endCxn id="45" idx="3"/>
+          </p:cNvCxnSpPr>
+          <p:nvPr/>
+        </p:nvCxnSpPr>
+        <p:spPr>
+          <a:xfrm rot="5400000">
+            <a:off x="2104037" y="3682019"/>
+            <a:ext cx="1325364" cy="1676577"/>
+          </a:xfrm>
+          <a:prstGeom prst="bentConnector2">
+            <a:avLst/>
+          </a:prstGeom>
+          <a:ln>
+            <a:solidFill>
+              <a:srgbClr val="FF0000"/>
+            </a:solidFill>
+            <a:tailEnd type="triangle"/>
+          </a:ln>
+        </p:spPr>
+        <p:style>
+          <a:lnRef idx="1">
+            <a:schemeClr val="accent1"/>
+          </a:lnRef>
+          <a:fillRef idx="0">
+            <a:schemeClr val="accent1"/>
+          </a:fillRef>
+          <a:effectRef idx="0">
+            <a:schemeClr val="accent1"/>
+          </a:effectRef>
+          <a:fontRef idx="minor">
+            <a:schemeClr val="tx1"/>
+          </a:fontRef>
+        </p:style>
+      </p:cxnSp>
+      <p:sp>
+        <p:nvSpPr>
+          <p:cNvPr id="45" name="矩形 44">
+            <a:extLst>
+              <a:ext uri="{FF2B5EF4-FFF2-40B4-BE49-F238E27FC236}">
+                <a16:creationId xmlns:a16="http://schemas.microsoft.com/office/drawing/2014/main" id="{024B07E1-2A9D-5DCB-CE70-DF63093CF013}"/>
+              </a:ext>
+            </a:extLst>
+          </p:cNvPr>
+          <p:cNvSpPr/>
+          <p:nvPr/>
+        </p:nvSpPr>
+        <p:spPr>
+          <a:xfrm>
+            <a:off x="1112171" y="4968478"/>
+            <a:ext cx="816259" cy="429022"/>
+          </a:xfrm>
+          <a:prstGeom prst="rect">
+            <a:avLst/>
+          </a:prstGeom>
+          <a:noFill/>
+          <a:ln>
+            <a:solidFill>
+              <a:schemeClr val="accent1"/>
+            </a:solidFill>
+          </a:ln>
+        </p:spPr>
+        <p:style>
+          <a:lnRef idx="2">
+            <a:schemeClr val="accent1">
+              <a:shade val="50000"/>
+            </a:schemeClr>
+          </a:lnRef>
+          <a:fillRef idx="1">
+            <a:schemeClr val="accent1"/>
+          </a:fillRef>
+          <a:effectRef idx="0">
+            <a:schemeClr val="accent1"/>
+          </a:effectRef>
+          <a:fontRef idx="minor">
+            <a:schemeClr val="lt1"/>
+          </a:fontRef>
+        </p:style>
+        <p:txBody>
+          <a:bodyPr rot="0" spcFirstLastPara="0" vertOverflow="overflow" horzOverflow="overflow" vert="horz" wrap="square" lIns="91440" tIns="45720" rIns="91440" bIns="45720" numCol="1" spcCol="0" rtlCol="0" fromWordArt="0" anchor="t" anchorCtr="0" forceAA="0" compatLnSpc="1">
+            <a:prstTxWarp prst="textNoShape">
+              <a:avLst/>
+            </a:prstTxWarp>
+            <a:noAutofit/>
+          </a:bodyPr>
+          <a:lstStyle/>
+          <a:p>
+            <a:pPr algn="l"/>
+            <a:endParaRPr lang="zh-TW" altLang="en-US" dirty="0"/>
+          </a:p>
+        </p:txBody>
+      </p:sp>
+      <p:sp>
+        <p:nvSpPr>
+          <p:cNvPr id="48" name="矩形 47">
+            <a:extLst>
+              <a:ext uri="{FF2B5EF4-FFF2-40B4-BE49-F238E27FC236}">
+                <a16:creationId xmlns:a16="http://schemas.microsoft.com/office/drawing/2014/main" id="{B876B80E-9A71-4736-8216-99448A76CB53}"/>
+              </a:ext>
+            </a:extLst>
+          </p:cNvPr>
+          <p:cNvSpPr/>
+          <p:nvPr/>
+        </p:nvSpPr>
+        <p:spPr>
+          <a:xfrm>
+            <a:off x="4513067" y="3330575"/>
+            <a:ext cx="435171" cy="527050"/>
+          </a:xfrm>
+          <a:prstGeom prst="rect">
+            <a:avLst/>
+          </a:prstGeom>
+          <a:noFill/>
+          <a:ln>
+            <a:solidFill>
+              <a:schemeClr val="accent1"/>
+            </a:solidFill>
+          </a:ln>
+        </p:spPr>
+        <p:style>
+          <a:lnRef idx="2">
+            <a:schemeClr val="accent1">
+              <a:shade val="50000"/>
+            </a:schemeClr>
+          </a:lnRef>
+          <a:fillRef idx="1">
+            <a:schemeClr val="accent1"/>
+          </a:fillRef>
+          <a:effectRef idx="0">
+            <a:schemeClr val="accent1"/>
+          </a:effectRef>
+          <a:fontRef idx="minor">
+            <a:schemeClr val="lt1"/>
+          </a:fontRef>
+        </p:style>
+        <p:txBody>
+          <a:bodyPr rot="0" spcFirstLastPara="0" vertOverflow="overflow" horzOverflow="overflow" vert="horz" wrap="square" lIns="91440" tIns="45720" rIns="91440" bIns="45720" numCol="1" spcCol="0" rtlCol="0" fromWordArt="0" anchor="t" anchorCtr="0" forceAA="0" compatLnSpc="1">
+            <a:prstTxWarp prst="textNoShape">
+              <a:avLst/>
+            </a:prstTxWarp>
+            <a:noAutofit/>
+          </a:bodyPr>
+          <a:lstStyle/>
+          <a:p>
+            <a:pPr algn="l"/>
+            <a:endParaRPr lang="zh-TW" altLang="en-US" dirty="0"/>
+          </a:p>
+        </p:txBody>
+      </p:sp>
+      <p:cxnSp>
+        <p:nvCxnSpPr>
+          <p:cNvPr id="50" name="直線單箭頭接點 49">
+            <a:extLst>
+              <a:ext uri="{FF2B5EF4-FFF2-40B4-BE49-F238E27FC236}">
+                <a16:creationId xmlns:a16="http://schemas.microsoft.com/office/drawing/2014/main" id="{126C126D-8278-A53B-A59C-B5ACEBC6523B}"/>
+              </a:ext>
+            </a:extLst>
+          </p:cNvPr>
+          <p:cNvCxnSpPr/>
+          <p:nvPr/>
+        </p:nvCxnSpPr>
+        <p:spPr>
+          <a:xfrm flipH="1">
+            <a:off x="4481513" y="3857624"/>
+            <a:ext cx="228600" cy="1110854"/>
+          </a:xfrm>
+          <a:prstGeom prst="straightConnector1">
+            <a:avLst/>
+          </a:prstGeom>
+          <a:ln>
+            <a:solidFill>
+              <a:srgbClr val="FF0000"/>
+            </a:solidFill>
+            <a:tailEnd type="triangle"/>
+          </a:ln>
+        </p:spPr>
+        <p:style>
+          <a:lnRef idx="1">
+            <a:schemeClr val="accent1"/>
+          </a:lnRef>
+          <a:fillRef idx="0">
+            <a:schemeClr val="accent1"/>
+          </a:fillRef>
+          <a:effectRef idx="0">
+            <a:schemeClr val="accent1"/>
+          </a:effectRef>
+          <a:fontRef idx="minor">
+            <a:schemeClr val="tx1"/>
+          </a:fontRef>
+        </p:style>
+      </p:cxnSp>
+      <p:sp>
+        <p:nvSpPr>
+          <p:cNvPr id="51" name="矩形 50">
+            <a:extLst>
+              <a:ext uri="{FF2B5EF4-FFF2-40B4-BE49-F238E27FC236}">
+                <a16:creationId xmlns:a16="http://schemas.microsoft.com/office/drawing/2014/main" id="{FB4B0B7D-E2B3-580E-D5B3-F41C9727DFFB}"/>
+              </a:ext>
+            </a:extLst>
+          </p:cNvPr>
+          <p:cNvSpPr/>
+          <p:nvPr/>
+        </p:nvSpPr>
+        <p:spPr>
+          <a:xfrm>
+            <a:off x="3986008" y="4968478"/>
+            <a:ext cx="610011" cy="475912"/>
+          </a:xfrm>
+          <a:prstGeom prst="rect">
+            <a:avLst/>
+          </a:prstGeom>
+          <a:noFill/>
+          <a:ln>
+            <a:solidFill>
+              <a:schemeClr val="accent1"/>
+            </a:solidFill>
+          </a:ln>
+        </p:spPr>
+        <p:style>
+          <a:lnRef idx="2">
+            <a:schemeClr val="accent1">
+              <a:shade val="50000"/>
+            </a:schemeClr>
+          </a:lnRef>
+          <a:fillRef idx="1">
+            <a:schemeClr val="accent1"/>
+          </a:fillRef>
+          <a:effectRef idx="0">
+            <a:schemeClr val="accent1"/>
+          </a:effectRef>
+          <a:fontRef idx="minor">
+            <a:schemeClr val="lt1"/>
+          </a:fontRef>
+        </p:style>
+        <p:txBody>
+          <a:bodyPr rot="0" spcFirstLastPara="0" vertOverflow="overflow" horzOverflow="overflow" vert="horz" wrap="square" lIns="91440" tIns="45720" rIns="91440" bIns="45720" numCol="1" spcCol="0" rtlCol="0" fromWordArt="0" anchor="t" anchorCtr="0" forceAA="0" compatLnSpc="1">
+            <a:prstTxWarp prst="textNoShape">
+              <a:avLst/>
+            </a:prstTxWarp>
+            <a:noAutofit/>
+          </a:bodyPr>
+          <a:lstStyle/>
+          <a:p>
+            <a:pPr algn="l"/>
+            <a:endParaRPr lang="zh-TW" altLang="en-US" dirty="0"/>
+          </a:p>
+        </p:txBody>
+      </p:sp>
+    </p:spTree>
+    <p:extLst>
+      <p:ext uri="{BB962C8B-B14F-4D97-AF65-F5344CB8AC3E}">
+        <p14:creationId xmlns:p14="http://schemas.microsoft.com/office/powerpoint/2010/main" val="3380829049"/>
+      </p:ext>
+    </p:extLst>
+  </p:cSld>
+  <p:clrMapOvr>
+    <a:masterClrMapping/>
+  </p:clrMapOvr>
+  <mc:AlternateContent xmlns:mc="http://schemas.openxmlformats.org/markup-compatibility/2006">
+    <mc:Choice xmlns:p14="http://schemas.microsoft.com/office/powerpoint/2010/main" Requires="p14">
+      <p:transition spd="med" p14:dur="700">
+        <p:fade/>
+      </p:transition>
+    </mc:Choice>
+    <mc:Fallback>
+      <p:transition spd="med">
+        <p:fade/>
+      </p:transition>
+    </mc:Fallback>
+  </mc:AlternateContent>
 </p:sld>
 </file>
 
@@ -43728,7 +44781,7 @@
         <p:spPr>
           <a:xfrm>
             <a:off x="838200" y="365125"/>
-            <a:ext cx="10515600" cy="1325563"/>
+            <a:ext cx="10515600" cy="485775"/>
           </a:xfrm>
         </p:spPr>
         <p:txBody>
@@ -46623,6 +47676,477 @@
 </p:sld>
 </file>
 
+<file path=ppt/slides/slide9.xml><?xml version="1.0" encoding="utf-8"?>
+<p:sld xmlns:a="http://schemas.openxmlformats.org/drawingml/2006/main" xmlns:r="http://schemas.openxmlformats.org/officeDocument/2006/relationships" xmlns:p="http://schemas.openxmlformats.org/presentationml/2006/main">
+  <p:cSld>
+    <p:spTree>
+      <p:nvGrpSpPr>
+        <p:cNvPr id="1" name=""/>
+        <p:cNvGrpSpPr/>
+        <p:nvPr/>
+      </p:nvGrpSpPr>
+      <p:grpSpPr>
+        <a:xfrm>
+          <a:off x="0" y="0"/>
+          <a:ext cx="0" cy="0"/>
+          <a:chOff x="0" y="0"/>
+          <a:chExt cx="0" cy="0"/>
+        </a:xfrm>
+      </p:grpSpPr>
+      <p:sp>
+        <p:nvSpPr>
+          <p:cNvPr id="2" name="內容版面配置區 1">
+            <a:extLst>
+              <a:ext uri="{FF2B5EF4-FFF2-40B4-BE49-F238E27FC236}">
+                <a16:creationId xmlns:a16="http://schemas.microsoft.com/office/drawing/2014/main" id="{7CF8EB48-BAD8-2FBD-535B-2181BD586B09}"/>
+              </a:ext>
+            </a:extLst>
+          </p:cNvPr>
+          <p:cNvSpPr>
+            <a:spLocks noGrp="1"/>
+          </p:cNvSpPr>
+          <p:nvPr>
+            <p:ph idx="1"/>
+          </p:nvPr>
+        </p:nvSpPr>
+        <p:spPr/>
+        <p:txBody>
+          <a:bodyPr/>
+          <a:lstStyle/>
+          <a:p>
+            <a:r>
+              <a:rPr lang="en-US" altLang="zh-TW" dirty="0"/>
+              <a:t>Update the I2C command by BMC </a:t>
+            </a:r>
+            <a:br>
+              <a:rPr lang="en-US" altLang="zh-TW" dirty="0"/>
+            </a:br>
+            <a:br>
+              <a:rPr lang="en-US" altLang="zh-TW" dirty="0"/>
+            </a:br>
+            <a:r>
+              <a:rPr lang="en-US" altLang="zh-TW" sz="1600" dirty="0">
+                <a:latin typeface="Calibri" panose="020F0502020204030204" pitchFamily="34" charset="0"/>
+                <a:ea typeface="Calibri" panose="020F0502020204030204" pitchFamily="34" charset="0"/>
+                <a:cs typeface="Calibri" panose="020F0502020204030204" pitchFamily="34" charset="0"/>
+              </a:rPr>
+              <a:t>For Ex :</a:t>
+            </a:r>
+            <a:br>
+              <a:rPr lang="en-US" altLang="zh-TW" sz="1600" dirty="0">
+                <a:latin typeface="Calibri" panose="020F0502020204030204" pitchFamily="34" charset="0"/>
+                <a:ea typeface="Calibri" panose="020F0502020204030204" pitchFamily="34" charset="0"/>
+                <a:cs typeface="Calibri" panose="020F0502020204030204" pitchFamily="34" charset="0"/>
+              </a:rPr>
+            </a:br>
+            <a:br>
+              <a:rPr lang="en-US" altLang="zh-TW" sz="1600" dirty="0">
+                <a:latin typeface="Calibri" panose="020F0502020204030204" pitchFamily="34" charset="0"/>
+                <a:ea typeface="Calibri" panose="020F0502020204030204" pitchFamily="34" charset="0"/>
+                <a:cs typeface="Calibri" panose="020F0502020204030204" pitchFamily="34" charset="0"/>
+              </a:rPr>
+            </a:br>
+            <a:r>
+              <a:rPr lang="en-US" altLang="zh-TW" sz="1600" dirty="0">
+                <a:latin typeface="Calibri" panose="020F0502020204030204" pitchFamily="34" charset="0"/>
+                <a:ea typeface="Calibri" panose="020F0502020204030204" pitchFamily="34" charset="0"/>
+                <a:cs typeface="Calibri" panose="020F0502020204030204" pitchFamily="34" charset="0"/>
+              </a:rPr>
+              <a:t>HM12</a:t>
+            </a:r>
+            <a:r>
+              <a:rPr lang="zh-TW" altLang="en-US" sz="1600" dirty="0">
+                <a:latin typeface="Calibri" panose="020F0502020204030204" pitchFamily="34" charset="0"/>
+                <a:cs typeface="Calibri" panose="020F0502020204030204" pitchFamily="34" charset="0"/>
+              </a:rPr>
+              <a:t> </a:t>
+            </a:r>
+            <a:r>
+              <a:rPr lang="en-US" altLang="zh-TW" sz="1600" dirty="0">
+                <a:latin typeface="Calibri" panose="020F0502020204030204" pitchFamily="34" charset="0"/>
+                <a:ea typeface="Calibri" panose="020F0502020204030204" pitchFamily="34" charset="0"/>
+                <a:cs typeface="Calibri" panose="020F0502020204030204" pitchFamily="34" charset="0"/>
+              </a:rPr>
+              <a:t>HPM CPLD</a:t>
+            </a:r>
+            <a:r>
+              <a:rPr lang="zh-TW" altLang="en-US" sz="1600" dirty="0">
+                <a:latin typeface="Calibri" panose="020F0502020204030204" pitchFamily="34" charset="0"/>
+                <a:cs typeface="Calibri" panose="020F0502020204030204" pitchFamily="34" charset="0"/>
+              </a:rPr>
+              <a:t>                     </a:t>
+            </a:r>
+            <a:r>
+              <a:rPr lang="en-US" altLang="zh-TW" sz="1600" dirty="0">
+                <a:latin typeface="Calibri" panose="020F0502020204030204" pitchFamily="34" charset="0"/>
+                <a:ea typeface="Calibri" panose="020F0502020204030204" pitchFamily="34" charset="0"/>
+                <a:cs typeface="Calibri" panose="020F0502020204030204" pitchFamily="34" charset="0"/>
+              </a:rPr>
+              <a:t>vs </a:t>
+            </a:r>
+            <a:r>
+              <a:rPr lang="zh-TW" altLang="en-US" sz="1600" dirty="0">
+                <a:latin typeface="Calibri" panose="020F0502020204030204" pitchFamily="34" charset="0"/>
+                <a:ea typeface="Calibri" panose="020F0502020204030204" pitchFamily="34" charset="0"/>
+                <a:cs typeface="Calibri" panose="020F0502020204030204" pitchFamily="34" charset="0"/>
+              </a:rPr>
+              <a:t>     </a:t>
+            </a:r>
+            <a:r>
+              <a:rPr lang="en-US" altLang="zh-TW" sz="1600" dirty="0">
+                <a:latin typeface="Calibri" panose="020F0502020204030204" pitchFamily="34" charset="0"/>
+                <a:ea typeface="Calibri" panose="020F0502020204030204" pitchFamily="34" charset="0"/>
+                <a:cs typeface="Calibri" panose="020F0502020204030204" pitchFamily="34" charset="0"/>
+              </a:rPr>
+              <a:t>HM11</a:t>
+            </a:r>
+            <a:r>
+              <a:rPr lang="zh-TW" altLang="en-US" sz="1600" dirty="0">
+                <a:latin typeface="Calibri" panose="020F0502020204030204" pitchFamily="34" charset="0"/>
+                <a:cs typeface="Calibri" panose="020F0502020204030204" pitchFamily="34" charset="0"/>
+              </a:rPr>
+              <a:t> </a:t>
+            </a:r>
+            <a:r>
+              <a:rPr lang="en-US" altLang="zh-TW" sz="1600" dirty="0">
+                <a:latin typeface="Calibri" panose="020F0502020204030204" pitchFamily="34" charset="0"/>
+                <a:ea typeface="Calibri" panose="020F0502020204030204" pitchFamily="34" charset="0"/>
+                <a:cs typeface="Calibri" panose="020F0502020204030204" pitchFamily="34" charset="0"/>
+              </a:rPr>
+              <a:t>HPM CPLD </a:t>
+            </a:r>
+            <a:br>
+              <a:rPr lang="en-US" altLang="zh-TW" dirty="0"/>
+            </a:br>
+            <a:endParaRPr lang="zh-TW" altLang="en-US" dirty="0"/>
+          </a:p>
+        </p:txBody>
+      </p:sp>
+      <p:sp>
+        <p:nvSpPr>
+          <p:cNvPr id="3" name="投影片編號版面配置區 2">
+            <a:extLst>
+              <a:ext uri="{FF2B5EF4-FFF2-40B4-BE49-F238E27FC236}">
+                <a16:creationId xmlns:a16="http://schemas.microsoft.com/office/drawing/2014/main" id="{19CB0EEA-861B-00AB-B11C-29E7E45B31BA}"/>
+              </a:ext>
+            </a:extLst>
+          </p:cNvPr>
+          <p:cNvSpPr>
+            <a:spLocks noGrp="1"/>
+          </p:cNvSpPr>
+          <p:nvPr>
+            <p:ph type="sldNum" sz="quarter" idx="10"/>
+          </p:nvPr>
+        </p:nvSpPr>
+        <p:spPr/>
+        <p:txBody>
+          <a:bodyPr/>
+          <a:lstStyle/>
+          <a:p>
+            <a:pPr algn="ctr"/>
+            <a:fld id="{9A19501A-2BD8-413C-A869-D888369A0240}" type="slidenum">
+              <a:rPr lang="en-US" smtClean="0"/>
+              <a:pPr algn="ctr"/>
+              <a:t>9</a:t>
+            </a:fld>
+            <a:endParaRPr lang="en-US"/>
+          </a:p>
+        </p:txBody>
+      </p:sp>
+      <p:sp>
+        <p:nvSpPr>
+          <p:cNvPr id="4" name="標題 3">
+            <a:extLst>
+              <a:ext uri="{FF2B5EF4-FFF2-40B4-BE49-F238E27FC236}">
+                <a16:creationId xmlns:a16="http://schemas.microsoft.com/office/drawing/2014/main" id="{71C05520-3891-9EF1-4E13-D75BF9FBFF89}"/>
+              </a:ext>
+            </a:extLst>
+          </p:cNvPr>
+          <p:cNvSpPr>
+            <a:spLocks noGrp="1"/>
+          </p:cNvSpPr>
+          <p:nvPr>
+            <p:ph type="title"/>
+          </p:nvPr>
+        </p:nvSpPr>
+        <p:spPr/>
+        <p:txBody>
+          <a:bodyPr/>
+          <a:lstStyle/>
+          <a:p>
+            <a:r>
+              <a:rPr lang="en-US" altLang="zh-TW" b="1" dirty="0">
+                <a:latin typeface="Times New Roman" panose="02020603050405020304" pitchFamily="18" charset="0"/>
+                <a:cs typeface="Times New Roman" panose="02020603050405020304" pitchFamily="18" charset="0"/>
+              </a:rPr>
+              <a:t> Update the Code for Another Project</a:t>
+            </a:r>
+            <a:endParaRPr lang="zh-TW" altLang="en-US" b="1" dirty="0">
+              <a:latin typeface="Times New Roman" panose="02020603050405020304" pitchFamily="18" charset="0"/>
+              <a:cs typeface="Times New Roman" panose="02020603050405020304" pitchFamily="18" charset="0"/>
+            </a:endParaRPr>
+          </a:p>
+        </p:txBody>
+      </p:sp>
+      <p:pic>
+        <p:nvPicPr>
+          <p:cNvPr id="6" name="圖片 5">
+            <a:extLst>
+              <a:ext uri="{FF2B5EF4-FFF2-40B4-BE49-F238E27FC236}">
+                <a16:creationId xmlns:a16="http://schemas.microsoft.com/office/drawing/2014/main" id="{EFD5A27D-8345-B8BD-F57D-7EF42BEB7645}"/>
+              </a:ext>
+            </a:extLst>
+          </p:cNvPr>
+          <p:cNvPicPr>
+            <a:picLocks noChangeAspect="1"/>
+          </p:cNvPicPr>
+          <p:nvPr/>
+        </p:nvPicPr>
+        <p:blipFill>
+          <a:blip r:embed="rId2"/>
+          <a:stretch>
+            <a:fillRect/>
+          </a:stretch>
+        </p:blipFill>
+        <p:spPr>
+          <a:xfrm>
+            <a:off x="6387253" y="1081081"/>
+            <a:ext cx="4975153" cy="2440641"/>
+          </a:xfrm>
+          <a:prstGeom prst="rect">
+            <a:avLst/>
+          </a:prstGeom>
+        </p:spPr>
+      </p:pic>
+      <p:pic>
+        <p:nvPicPr>
+          <p:cNvPr id="8" name="圖片 7">
+            <a:extLst>
+              <a:ext uri="{FF2B5EF4-FFF2-40B4-BE49-F238E27FC236}">
+                <a16:creationId xmlns:a16="http://schemas.microsoft.com/office/drawing/2014/main" id="{7B3DBAB2-8E8D-469D-1735-CC9A9A7CC3C8}"/>
+              </a:ext>
+            </a:extLst>
+          </p:cNvPr>
+          <p:cNvPicPr>
+            <a:picLocks noChangeAspect="1"/>
+          </p:cNvPicPr>
+          <p:nvPr/>
+        </p:nvPicPr>
+        <p:blipFill>
+          <a:blip r:embed="rId3"/>
+          <a:stretch>
+            <a:fillRect/>
+          </a:stretch>
+        </p:blipFill>
+        <p:spPr>
+          <a:xfrm>
+            <a:off x="3422650" y="2540908"/>
+            <a:ext cx="1697195" cy="704534"/>
+          </a:xfrm>
+          <a:prstGeom prst="rect">
+            <a:avLst/>
+          </a:prstGeom>
+        </p:spPr>
+      </p:pic>
+      <p:pic>
+        <p:nvPicPr>
+          <p:cNvPr id="10" name="圖片 9">
+            <a:extLst>
+              <a:ext uri="{FF2B5EF4-FFF2-40B4-BE49-F238E27FC236}">
+                <a16:creationId xmlns:a16="http://schemas.microsoft.com/office/drawing/2014/main" id="{4BC741C0-FE26-FAAF-BCDC-26BD996E58B4}"/>
+              </a:ext>
+            </a:extLst>
+          </p:cNvPr>
+          <p:cNvPicPr>
+            <a:picLocks noChangeAspect="1"/>
+          </p:cNvPicPr>
+          <p:nvPr/>
+        </p:nvPicPr>
+        <p:blipFill>
+          <a:blip r:embed="rId4"/>
+          <a:stretch>
+            <a:fillRect/>
+          </a:stretch>
+        </p:blipFill>
+        <p:spPr>
+          <a:xfrm>
+            <a:off x="5119845" y="4609484"/>
+            <a:ext cx="4344006" cy="1133633"/>
+          </a:xfrm>
+          <a:prstGeom prst="rect">
+            <a:avLst/>
+          </a:prstGeom>
+        </p:spPr>
+      </p:pic>
+      <p:pic>
+        <p:nvPicPr>
+          <p:cNvPr id="12" name="圖片 11">
+            <a:extLst>
+              <a:ext uri="{FF2B5EF4-FFF2-40B4-BE49-F238E27FC236}">
+                <a16:creationId xmlns:a16="http://schemas.microsoft.com/office/drawing/2014/main" id="{6F025E44-3D11-AB89-49F8-A715884F05C2}"/>
+              </a:ext>
+            </a:extLst>
+          </p:cNvPr>
+          <p:cNvPicPr>
+            <a:picLocks noChangeAspect="1"/>
+          </p:cNvPicPr>
+          <p:nvPr/>
+        </p:nvPicPr>
+        <p:blipFill>
+          <a:blip r:embed="rId5"/>
+          <a:stretch>
+            <a:fillRect/>
+          </a:stretch>
+        </p:blipFill>
+        <p:spPr>
+          <a:xfrm>
+            <a:off x="549351" y="2540907"/>
+            <a:ext cx="2055499" cy="704535"/>
+          </a:xfrm>
+          <a:prstGeom prst="rect">
+            <a:avLst/>
+          </a:prstGeom>
+        </p:spPr>
+      </p:pic>
+      <p:sp>
+        <p:nvSpPr>
+          <p:cNvPr id="13" name="箭號: 向右 12">
+            <a:extLst>
+              <a:ext uri="{FF2B5EF4-FFF2-40B4-BE49-F238E27FC236}">
+                <a16:creationId xmlns:a16="http://schemas.microsoft.com/office/drawing/2014/main" id="{7ED7B717-37DB-600B-6485-8190557F269C}"/>
+              </a:ext>
+            </a:extLst>
+          </p:cNvPr>
+          <p:cNvSpPr/>
+          <p:nvPr/>
+        </p:nvSpPr>
+        <p:spPr>
+          <a:xfrm rot="12893063">
+            <a:off x="2990056" y="3797299"/>
+            <a:ext cx="1809750" cy="654050"/>
+          </a:xfrm>
+          <a:prstGeom prst="rightArrow">
+            <a:avLst/>
+          </a:prstGeom>
+          <a:solidFill>
+            <a:srgbClr val="FF0000"/>
+          </a:solidFill>
+          <a:ln>
+            <a:noFill/>
+          </a:ln>
+        </p:spPr>
+        <p:style>
+          <a:lnRef idx="2">
+            <a:schemeClr val="accent1">
+              <a:shade val="50000"/>
+            </a:schemeClr>
+          </a:lnRef>
+          <a:fillRef idx="1">
+            <a:schemeClr val="accent1"/>
+          </a:fillRef>
+          <a:effectRef idx="0">
+            <a:schemeClr val="accent1"/>
+          </a:effectRef>
+          <a:fontRef idx="minor">
+            <a:schemeClr val="lt1"/>
+          </a:fontRef>
+        </p:style>
+        <p:txBody>
+          <a:bodyPr rot="0" spcFirstLastPara="0" vertOverflow="overflow" horzOverflow="overflow" vert="horz" wrap="square" lIns="91440" tIns="45720" rIns="91440" bIns="45720" numCol="1" spcCol="0" rtlCol="0" fromWordArt="0" anchor="t" anchorCtr="0" forceAA="0" compatLnSpc="1">
+            <a:prstTxWarp prst="textNoShape">
+              <a:avLst/>
+            </a:prstTxWarp>
+            <a:noAutofit/>
+          </a:bodyPr>
+          <a:lstStyle/>
+          <a:p>
+            <a:pPr algn="l"/>
+            <a:endParaRPr lang="zh-TW" altLang="en-US" dirty="0"/>
+          </a:p>
+        </p:txBody>
+      </p:sp>
+      <p:sp>
+        <p:nvSpPr>
+          <p:cNvPr id="14" name="箭號: 向右 13">
+            <a:extLst>
+              <a:ext uri="{FF2B5EF4-FFF2-40B4-BE49-F238E27FC236}">
+                <a16:creationId xmlns:a16="http://schemas.microsoft.com/office/drawing/2014/main" id="{9B2DFAF0-2D2C-5559-1C38-22E6C7E9598C}"/>
+              </a:ext>
+            </a:extLst>
+          </p:cNvPr>
+          <p:cNvSpPr/>
+          <p:nvPr/>
+        </p:nvSpPr>
+        <p:spPr>
+          <a:xfrm rot="6855323">
+            <a:off x="7097804" y="2956457"/>
+            <a:ext cx="2665947" cy="654050"/>
+          </a:xfrm>
+          <a:prstGeom prst="rightArrow">
+            <a:avLst/>
+          </a:prstGeom>
+          <a:solidFill>
+            <a:srgbClr val="FF0000"/>
+          </a:solidFill>
+          <a:ln>
+            <a:noFill/>
+          </a:ln>
+        </p:spPr>
+        <p:style>
+          <a:lnRef idx="2">
+            <a:schemeClr val="accent1">
+              <a:shade val="50000"/>
+            </a:schemeClr>
+          </a:lnRef>
+          <a:fillRef idx="1">
+            <a:schemeClr val="accent1"/>
+          </a:fillRef>
+          <a:effectRef idx="0">
+            <a:schemeClr val="accent1"/>
+          </a:effectRef>
+          <a:fontRef idx="minor">
+            <a:schemeClr val="lt1"/>
+          </a:fontRef>
+        </p:style>
+        <p:txBody>
+          <a:bodyPr rot="0" spcFirstLastPara="0" vertOverflow="overflow" horzOverflow="overflow" vert="horz" wrap="square" lIns="91440" tIns="45720" rIns="91440" bIns="45720" numCol="1" spcCol="0" rtlCol="0" fromWordArt="0" anchor="t" anchorCtr="0" forceAA="0" compatLnSpc="1">
+            <a:prstTxWarp prst="textNoShape">
+              <a:avLst/>
+            </a:prstTxWarp>
+            <a:noAutofit/>
+          </a:bodyPr>
+          <a:lstStyle/>
+          <a:p>
+            <a:pPr algn="l"/>
+            <a:endParaRPr lang="zh-TW" altLang="en-US" dirty="0"/>
+          </a:p>
+        </p:txBody>
+      </p:sp>
+    </p:spTree>
+    <p:extLst>
+      <p:ext uri="{BB962C8B-B14F-4D97-AF65-F5344CB8AC3E}">
+        <p14:creationId xmlns:p14="http://schemas.microsoft.com/office/powerpoint/2010/main" val="40970623"/>
+      </p:ext>
+    </p:extLst>
+  </p:cSld>
+  <p:clrMapOvr>
+    <a:masterClrMapping/>
+  </p:clrMapOvr>
+  <mc:AlternateContent xmlns:mc="http://schemas.openxmlformats.org/markup-compatibility/2006" xmlns:p14="http://schemas.microsoft.com/office/powerpoint/2010/main">
+    <mc:Choice Requires="p14">
+      <p:transition spd="med" p14:dur="700">
+        <p:fade/>
+      </p:transition>
+    </mc:Choice>
+    <mc:Fallback xmlns="">
+      <p:transition spd="med">
+        <p:fade/>
+      </p:transition>
+    </mc:Fallback>
+  </mc:AlternateContent>
+</p:sld>
+</file>
+
 <file path=ppt/theme/theme1.xml><?xml version="1.0" encoding="utf-8"?>
 <a:theme xmlns:a="http://schemas.openxmlformats.org/drawingml/2006/main" name="Lenovo 2015 Template">
   <a:themeElements>
@@ -47530,6 +49054,26 @@
 </file>
 
 <file path=customXml/item1.xml><?xml version="1.0" encoding="utf-8"?>
+<?mso-contentType ?>
+<FormTemplates xmlns="http://schemas.microsoft.com/sharepoint/v3/contenttype/forms">
+  <Display>DocumentLibraryForm</Display>
+  <Edit>DocumentLibraryForm</Edit>
+  <New>DocumentLibraryForm</New>
+</FormTemplates>
+</file>
+
+<file path=customXml/item2.xml><?xml version="1.0" encoding="utf-8"?>
+<p:properties xmlns:p="http://schemas.microsoft.com/office/2006/metadata/properties" xmlns:xsi="http://www.w3.org/2001/XMLSchema-instance" xmlns:pc="http://schemas.microsoft.com/office/infopath/2007/PartnerControls">
+  <documentManagement>
+    <lcf76f155ced4ddcb4097134ff3c332f xmlns="ef5e11c2-b5ac-4666-8d00-3459fd1c379e">
+      <Terms xmlns="http://schemas.microsoft.com/office/infopath/2007/PartnerControls"/>
+    </lcf76f155ced4ddcb4097134ff3c332f>
+    <TaxCatchAll xmlns="9bcaaf7c-080f-42ac-930b-884bf9d65b76" xsi:nil="true"/>
+  </documentManagement>
+</p:properties>
+</file>
+
+<file path=customXml/item3.xml><?xml version="1.0" encoding="utf-8"?>
 <ct:contentTypeSchema xmlns:ct="http://schemas.microsoft.com/office/2006/metadata/contentType" xmlns:ma="http://schemas.microsoft.com/office/2006/metadata/properties/metaAttributes" ct:_="" ma:_="" ma:contentTypeName="Document" ma:contentTypeID="0x0101001045B87DCFAA6949ADF5FA7D320B3C2A" ma:contentTypeVersion="13" ma:contentTypeDescription="Create a new document." ma:contentTypeScope="" ma:versionID="614e9ae2da6d6be75aecf84f483be4ad">
   <xsd:schema xmlns:xsd="http://www.w3.org/2001/XMLSchema" xmlns:xs="http://www.w3.org/2001/XMLSchema" xmlns:p="http://schemas.microsoft.com/office/2006/metadata/properties" xmlns:ns2="ef5e11c2-b5ac-4666-8d00-3459fd1c379e" xmlns:ns3="9bcaaf7c-080f-42ac-930b-884bf9d65b76" targetNamespace="http://schemas.microsoft.com/office/2006/metadata/properties" ma:root="true" ma:fieldsID="0f56d87e144bd56cdac9bfe103670131" ns2:_="" ns3:_="">
     <xsd:import namespace="ef5e11c2-b5ac-4666-8d00-3459fd1c379e"/>
@@ -47736,41 +49280,10 @@
 </ct:contentTypeSchema>
 </file>
 
-<file path=customXml/item2.xml><?xml version="1.0" encoding="utf-8"?>
-<p:properties xmlns:p="http://schemas.microsoft.com/office/2006/metadata/properties" xmlns:xsi="http://www.w3.org/2001/XMLSchema-instance" xmlns:pc="http://schemas.microsoft.com/office/infopath/2007/PartnerControls">
-  <documentManagement>
-    <lcf76f155ced4ddcb4097134ff3c332f xmlns="ef5e11c2-b5ac-4666-8d00-3459fd1c379e">
-      <Terms xmlns="http://schemas.microsoft.com/office/infopath/2007/PartnerControls"/>
-    </lcf76f155ced4ddcb4097134ff3c332f>
-    <TaxCatchAll xmlns="9bcaaf7c-080f-42ac-930b-884bf9d65b76" xsi:nil="true"/>
-  </documentManagement>
-</p:properties>
-</file>
-
-<file path=customXml/item3.xml><?xml version="1.0" encoding="utf-8"?>
-<?mso-contentType ?>
-<FormTemplates xmlns="http://schemas.microsoft.com/sharepoint/v3/contenttype/forms">
-  <Display>DocumentLibraryForm</Display>
-  <Edit>DocumentLibraryForm</Edit>
-  <New>DocumentLibraryForm</New>
-</FormTemplates>
-</file>
-
 <file path=customXml/itemProps1.xml><?xml version="1.0" encoding="utf-8"?>
-<ds:datastoreItem xmlns:ds="http://schemas.openxmlformats.org/officeDocument/2006/customXml" ds:itemID="{6273CFFE-DBF1-4185-837B-61BA92BB6275}">
+<ds:datastoreItem xmlns:ds="http://schemas.openxmlformats.org/officeDocument/2006/customXml" ds:itemID="{E7F203CD-7D6F-4603-BF64-D245475A3611}">
   <ds:schemaRefs>
-    <ds:schemaRef ds:uri="http://schemas.microsoft.com/office/2006/metadata/contentType"/>
-    <ds:schemaRef ds:uri="http://schemas.microsoft.com/office/2006/metadata/properties/metaAttributes"/>
-    <ds:schemaRef ds:uri="http://www.w3.org/2001/XMLSchema"/>
-    <ds:schemaRef ds:uri="http://schemas.microsoft.com/office/2006/metadata/properties"/>
-    <ds:schemaRef ds:uri="ef5e11c2-b5ac-4666-8d00-3459fd1c379e"/>
-    <ds:schemaRef ds:uri="9bcaaf7c-080f-42ac-930b-884bf9d65b76"/>
-    <ds:schemaRef ds:uri="http://schemas.microsoft.com/office/2006/documentManagement/types"/>
-    <ds:schemaRef ds:uri="http://schemas.microsoft.com/office/infopath/2007/PartnerControls"/>
-    <ds:schemaRef ds:uri="http://schemas.openxmlformats.org/package/2006/metadata/core-properties"/>
-    <ds:schemaRef ds:uri="http://purl.org/dc/elements/1.1/"/>
-    <ds:schemaRef ds:uri="http://purl.org/dc/terms/"/>
-    <ds:schemaRef ds:uri="http://schemas.microsoft.com/internal/obd"/>
+    <ds:schemaRef ds:uri="http://schemas.microsoft.com/sharepoint/v3/contenttype/forms"/>
   </ds:schemaRefs>
 </ds:datastoreItem>
 </file>
@@ -47798,9 +49311,20 @@
 </file>
 
 <file path=customXml/itemProps3.xml><?xml version="1.0" encoding="utf-8"?>
-<ds:datastoreItem xmlns:ds="http://schemas.openxmlformats.org/officeDocument/2006/customXml" ds:itemID="{E7F203CD-7D6F-4603-BF64-D245475A3611}">
+<ds:datastoreItem xmlns:ds="http://schemas.openxmlformats.org/officeDocument/2006/customXml" ds:itemID="{6273CFFE-DBF1-4185-837B-61BA92BB6275}">
   <ds:schemaRefs>
-    <ds:schemaRef ds:uri="http://schemas.microsoft.com/sharepoint/v3/contenttype/forms"/>
+    <ds:schemaRef ds:uri="http://schemas.microsoft.com/office/2006/metadata/contentType"/>
+    <ds:schemaRef ds:uri="http://schemas.microsoft.com/office/2006/metadata/properties/metaAttributes"/>
+    <ds:schemaRef ds:uri="http://www.w3.org/2001/XMLSchema"/>
+    <ds:schemaRef ds:uri="http://schemas.microsoft.com/office/2006/metadata/properties"/>
+    <ds:schemaRef ds:uri="ef5e11c2-b5ac-4666-8d00-3459fd1c379e"/>
+    <ds:schemaRef ds:uri="9bcaaf7c-080f-42ac-930b-884bf9d65b76"/>
+    <ds:schemaRef ds:uri="http://schemas.microsoft.com/office/2006/documentManagement/types"/>
+    <ds:schemaRef ds:uri="http://schemas.microsoft.com/office/infopath/2007/PartnerControls"/>
+    <ds:schemaRef ds:uri="http://schemas.openxmlformats.org/package/2006/metadata/core-properties"/>
+    <ds:schemaRef ds:uri="http://purl.org/dc/elements/1.1/"/>
+    <ds:schemaRef ds:uri="http://purl.org/dc/terms/"/>
+    <ds:schemaRef ds:uri="http://schemas.microsoft.com/internal/obd"/>
   </ds:schemaRefs>
 </ds:datastoreItem>
 </file>